--- a/Slides/Semana 3/semana_3_slides.pptx
+++ b/Slides/Semana 3/semana_3_slides.pptx
@@ -793,7 +793,7 @@
 - "O que vocês esperam aprender, além do conteúdo técnico, ao desenvolver este projeto?"
 - "Que público vocês já identificam como possível beneficiário da(s) ideia(s) de tema da equipe?"
 Avaliação nesta semana: observação inicial e informal de Planejamento (coerência tema/público) e Trabalho em Equipe (participação na exploração das fontes e no levantamento), conforme Rubrica de Avaliação — sem atribuição de nota.
-Fonte: Plano Semanal Semana 3, Cronograma, CLAUDE.md, COURSE_CONTEXT.md, PEDAGOGICAL_RULES.md, EXTENSION_PROJECT_GUIDE.md.</a:t>
+Fonte: Plano Semanal Semana 3, Cronograma.</a:t>
             </a:r>
             <a:endParaRPr lang="en-US" dirty="0"/>
           </a:p>
